--- a/選擇相信.pptx
+++ b/選擇相信.pptx
@@ -156,7 +156,7 @@
           <a:lstStyle/>
           <a:p>
             <a:r>
-              <a:rPr lang="en-US" altLang="zh-TW" smtClean="0"/>
+              <a:rPr lang="en-US" altLang="zh-TW"/>
               <a:t>Click to edit Master title style</a:t>
             </a:r>
             <a:endParaRPr lang="zh-TW" altLang="en-US"/>
@@ -275,7 +275,7 @@
           </a:lstStyle>
           <a:p>
             <a:r>
-              <a:rPr lang="en-US" altLang="zh-TW" smtClean="0"/>
+              <a:rPr lang="en-US" altLang="zh-TW"/>
               <a:t>Click to edit Master subtitle style</a:t>
             </a:r>
             <a:endParaRPr lang="zh-TW" altLang="en-US"/>
@@ -299,7 +299,7 @@
           <a:p>
             <a:fld id="{CF94A76A-8AAB-40C7-807F-FA7898E03B8A}" type="datetimeFigureOut">
               <a:rPr lang="vi-VN" smtClean="0"/>
-              <a:t>09/06/2022</a:t>
+              <a:t>07/11/2025</a:t>
             </a:fld>
             <a:endParaRPr lang="vi-VN"/>
           </a:p>
@@ -393,7 +393,7 @@
           <a:lstStyle/>
           <a:p>
             <a:r>
-              <a:rPr lang="en-US" altLang="zh-TW" smtClean="0"/>
+              <a:rPr lang="en-US" altLang="zh-TW"/>
               <a:t>Click to edit Master title style</a:t>
             </a:r>
             <a:endParaRPr lang="zh-TW" altLang="en-US"/>
@@ -417,35 +417,35 @@
           <a:p>
             <a:pPr lvl="0"/>
             <a:r>
-              <a:rPr lang="en-US" altLang="zh-TW" smtClean="0"/>
+              <a:rPr lang="en-US" altLang="zh-TW"/>
               <a:t>Edit Master text styles</a:t>
             </a:r>
           </a:p>
           <a:p>
             <a:pPr lvl="1"/>
             <a:r>
-              <a:rPr lang="en-US" altLang="zh-TW" smtClean="0"/>
+              <a:rPr lang="en-US" altLang="zh-TW"/>
               <a:t>Second level</a:t>
             </a:r>
           </a:p>
           <a:p>
             <a:pPr lvl="2"/>
             <a:r>
-              <a:rPr lang="en-US" altLang="zh-TW" smtClean="0"/>
+              <a:rPr lang="en-US" altLang="zh-TW"/>
               <a:t>Third level</a:t>
             </a:r>
           </a:p>
           <a:p>
             <a:pPr lvl="3"/>
             <a:r>
-              <a:rPr lang="en-US" altLang="zh-TW" smtClean="0"/>
+              <a:rPr lang="en-US" altLang="zh-TW"/>
               <a:t>Fourth level</a:t>
             </a:r>
           </a:p>
           <a:p>
             <a:pPr lvl="4"/>
             <a:r>
-              <a:rPr lang="en-US" altLang="zh-TW" smtClean="0"/>
+              <a:rPr lang="en-US" altLang="zh-TW"/>
               <a:t>Fifth level</a:t>
             </a:r>
             <a:endParaRPr lang="zh-TW" altLang="en-US"/>
@@ -469,7 +469,7 @@
           <a:p>
             <a:fld id="{CF94A76A-8AAB-40C7-807F-FA7898E03B8A}" type="datetimeFigureOut">
               <a:rPr lang="vi-VN" smtClean="0"/>
-              <a:t>09/06/2022</a:t>
+              <a:t>07/11/2025</a:t>
             </a:fld>
             <a:endParaRPr lang="vi-VN"/>
           </a:p>
@@ -568,7 +568,7 @@
           <a:lstStyle/>
           <a:p>
             <a:r>
-              <a:rPr lang="en-US" altLang="zh-TW" smtClean="0"/>
+              <a:rPr lang="en-US" altLang="zh-TW"/>
               <a:t>Click to edit Master title style</a:t>
             </a:r>
             <a:endParaRPr lang="zh-TW" altLang="en-US"/>
@@ -597,35 +597,35 @@
           <a:p>
             <a:pPr lvl="0"/>
             <a:r>
-              <a:rPr lang="en-US" altLang="zh-TW" smtClean="0"/>
+              <a:rPr lang="en-US" altLang="zh-TW"/>
               <a:t>Edit Master text styles</a:t>
             </a:r>
           </a:p>
           <a:p>
             <a:pPr lvl="1"/>
             <a:r>
-              <a:rPr lang="en-US" altLang="zh-TW" smtClean="0"/>
+              <a:rPr lang="en-US" altLang="zh-TW"/>
               <a:t>Second level</a:t>
             </a:r>
           </a:p>
           <a:p>
             <a:pPr lvl="2"/>
             <a:r>
-              <a:rPr lang="en-US" altLang="zh-TW" smtClean="0"/>
+              <a:rPr lang="en-US" altLang="zh-TW"/>
               <a:t>Third level</a:t>
             </a:r>
           </a:p>
           <a:p>
             <a:pPr lvl="3"/>
             <a:r>
-              <a:rPr lang="en-US" altLang="zh-TW" smtClean="0"/>
+              <a:rPr lang="en-US" altLang="zh-TW"/>
               <a:t>Fourth level</a:t>
             </a:r>
           </a:p>
           <a:p>
             <a:pPr lvl="4"/>
             <a:r>
-              <a:rPr lang="en-US" altLang="zh-TW" smtClean="0"/>
+              <a:rPr lang="en-US" altLang="zh-TW"/>
               <a:t>Fifth level</a:t>
             </a:r>
             <a:endParaRPr lang="zh-TW" altLang="en-US"/>
@@ -649,7 +649,7 @@
           <a:p>
             <a:fld id="{CF94A76A-8AAB-40C7-807F-FA7898E03B8A}" type="datetimeFigureOut">
               <a:rPr lang="vi-VN" smtClean="0"/>
-              <a:t>09/06/2022</a:t>
+              <a:t>07/11/2025</a:t>
             </a:fld>
             <a:endParaRPr lang="vi-VN"/>
           </a:p>
@@ -743,7 +743,7 @@
           <a:lstStyle/>
           <a:p>
             <a:r>
-              <a:rPr lang="en-US" altLang="zh-TW" smtClean="0"/>
+              <a:rPr lang="en-US" altLang="zh-TW"/>
               <a:t>Click to edit Master title style</a:t>
             </a:r>
             <a:endParaRPr lang="zh-TW" altLang="en-US"/>
@@ -767,35 +767,35 @@
           <a:p>
             <a:pPr lvl="0"/>
             <a:r>
-              <a:rPr lang="en-US" altLang="zh-TW" smtClean="0"/>
+              <a:rPr lang="en-US" altLang="zh-TW"/>
               <a:t>Edit Master text styles</a:t>
             </a:r>
           </a:p>
           <a:p>
             <a:pPr lvl="1"/>
             <a:r>
-              <a:rPr lang="en-US" altLang="zh-TW" smtClean="0"/>
+              <a:rPr lang="en-US" altLang="zh-TW"/>
               <a:t>Second level</a:t>
             </a:r>
           </a:p>
           <a:p>
             <a:pPr lvl="2"/>
             <a:r>
-              <a:rPr lang="en-US" altLang="zh-TW" smtClean="0"/>
+              <a:rPr lang="en-US" altLang="zh-TW"/>
               <a:t>Third level</a:t>
             </a:r>
           </a:p>
           <a:p>
             <a:pPr lvl="3"/>
             <a:r>
-              <a:rPr lang="en-US" altLang="zh-TW" smtClean="0"/>
+              <a:rPr lang="en-US" altLang="zh-TW"/>
               <a:t>Fourth level</a:t>
             </a:r>
           </a:p>
           <a:p>
             <a:pPr lvl="4"/>
             <a:r>
-              <a:rPr lang="en-US" altLang="zh-TW" smtClean="0"/>
+              <a:rPr lang="en-US" altLang="zh-TW"/>
               <a:t>Fifth level</a:t>
             </a:r>
             <a:endParaRPr lang="zh-TW" altLang="en-US"/>
@@ -819,7 +819,7 @@
           <a:p>
             <a:fld id="{CF94A76A-8AAB-40C7-807F-FA7898E03B8A}" type="datetimeFigureOut">
               <a:rPr lang="vi-VN" smtClean="0"/>
-              <a:t>09/06/2022</a:t>
+              <a:t>07/11/2025</a:t>
             </a:fld>
             <a:endParaRPr lang="vi-VN"/>
           </a:p>
@@ -922,7 +922,7 @@
           </a:lstStyle>
           <a:p>
             <a:r>
-              <a:rPr lang="en-US" altLang="zh-TW" smtClean="0"/>
+              <a:rPr lang="en-US" altLang="zh-TW"/>
               <a:t>Click to edit Master title style</a:t>
             </a:r>
             <a:endParaRPr lang="zh-TW" altLang="en-US"/>
@@ -1042,7 +1042,7 @@
           <a:p>
             <a:pPr lvl="0"/>
             <a:r>
-              <a:rPr lang="en-US" altLang="zh-TW" smtClean="0"/>
+              <a:rPr lang="en-US" altLang="zh-TW"/>
               <a:t>Edit Master text styles</a:t>
             </a:r>
           </a:p>
@@ -1065,7 +1065,7 @@
           <a:p>
             <a:fld id="{CF94A76A-8AAB-40C7-807F-FA7898E03B8A}" type="datetimeFigureOut">
               <a:rPr lang="vi-VN" smtClean="0"/>
-              <a:t>09/06/2022</a:t>
+              <a:t>07/11/2025</a:t>
             </a:fld>
             <a:endParaRPr lang="vi-VN"/>
           </a:p>
@@ -1159,7 +1159,7 @@
           <a:lstStyle/>
           <a:p>
             <a:r>
-              <a:rPr lang="en-US" altLang="zh-TW" smtClean="0"/>
+              <a:rPr lang="en-US" altLang="zh-TW"/>
               <a:t>Click to edit Master title style</a:t>
             </a:r>
             <a:endParaRPr lang="zh-TW" altLang="en-US"/>
@@ -1216,35 +1216,35 @@
           <a:p>
             <a:pPr lvl="0"/>
             <a:r>
-              <a:rPr lang="en-US" altLang="zh-TW" smtClean="0"/>
+              <a:rPr lang="en-US" altLang="zh-TW"/>
               <a:t>Edit Master text styles</a:t>
             </a:r>
           </a:p>
           <a:p>
             <a:pPr lvl="1"/>
             <a:r>
-              <a:rPr lang="en-US" altLang="zh-TW" smtClean="0"/>
+              <a:rPr lang="en-US" altLang="zh-TW"/>
               <a:t>Second level</a:t>
             </a:r>
           </a:p>
           <a:p>
             <a:pPr lvl="2"/>
             <a:r>
-              <a:rPr lang="en-US" altLang="zh-TW" smtClean="0"/>
+              <a:rPr lang="en-US" altLang="zh-TW"/>
               <a:t>Third level</a:t>
             </a:r>
           </a:p>
           <a:p>
             <a:pPr lvl="3"/>
             <a:r>
-              <a:rPr lang="en-US" altLang="zh-TW" smtClean="0"/>
+              <a:rPr lang="en-US" altLang="zh-TW"/>
               <a:t>Fourth level</a:t>
             </a:r>
           </a:p>
           <a:p>
             <a:pPr lvl="4"/>
             <a:r>
-              <a:rPr lang="en-US" altLang="zh-TW" smtClean="0"/>
+              <a:rPr lang="en-US" altLang="zh-TW"/>
               <a:t>Fifth level</a:t>
             </a:r>
             <a:endParaRPr lang="zh-TW" altLang="en-US"/>
@@ -1301,35 +1301,35 @@
           <a:p>
             <a:pPr lvl="0"/>
             <a:r>
-              <a:rPr lang="en-US" altLang="zh-TW" smtClean="0"/>
+              <a:rPr lang="en-US" altLang="zh-TW"/>
               <a:t>Edit Master text styles</a:t>
             </a:r>
           </a:p>
           <a:p>
             <a:pPr lvl="1"/>
             <a:r>
-              <a:rPr lang="en-US" altLang="zh-TW" smtClean="0"/>
+              <a:rPr lang="en-US" altLang="zh-TW"/>
               <a:t>Second level</a:t>
             </a:r>
           </a:p>
           <a:p>
             <a:pPr lvl="2"/>
             <a:r>
-              <a:rPr lang="en-US" altLang="zh-TW" smtClean="0"/>
+              <a:rPr lang="en-US" altLang="zh-TW"/>
               <a:t>Third level</a:t>
             </a:r>
           </a:p>
           <a:p>
             <a:pPr lvl="3"/>
             <a:r>
-              <a:rPr lang="en-US" altLang="zh-TW" smtClean="0"/>
+              <a:rPr lang="en-US" altLang="zh-TW"/>
               <a:t>Fourth level</a:t>
             </a:r>
           </a:p>
           <a:p>
             <a:pPr lvl="4"/>
             <a:r>
-              <a:rPr lang="en-US" altLang="zh-TW" smtClean="0"/>
+              <a:rPr lang="en-US" altLang="zh-TW"/>
               <a:t>Fifth level</a:t>
             </a:r>
             <a:endParaRPr lang="zh-TW" altLang="en-US"/>
@@ -1353,7 +1353,7 @@
           <a:p>
             <a:fld id="{CF94A76A-8AAB-40C7-807F-FA7898E03B8A}" type="datetimeFigureOut">
               <a:rPr lang="vi-VN" smtClean="0"/>
-              <a:t>09/06/2022</a:t>
+              <a:t>07/11/2025</a:t>
             </a:fld>
             <a:endParaRPr lang="vi-VN"/>
           </a:p>
@@ -1451,7 +1451,7 @@
           </a:lstStyle>
           <a:p>
             <a:r>
-              <a:rPr lang="en-US" altLang="zh-TW" smtClean="0"/>
+              <a:rPr lang="en-US" altLang="zh-TW"/>
               <a:t>Click to edit Master title style</a:t>
             </a:r>
             <a:endParaRPr lang="zh-TW" altLang="en-US"/>
@@ -1517,7 +1517,7 @@
           <a:p>
             <a:pPr lvl="0"/>
             <a:r>
-              <a:rPr lang="en-US" altLang="zh-TW" smtClean="0"/>
+              <a:rPr lang="en-US" altLang="zh-TW"/>
               <a:t>Edit Master text styles</a:t>
             </a:r>
           </a:p>
@@ -1573,35 +1573,35 @@
           <a:p>
             <a:pPr lvl="0"/>
             <a:r>
-              <a:rPr lang="en-US" altLang="zh-TW" smtClean="0"/>
+              <a:rPr lang="en-US" altLang="zh-TW"/>
               <a:t>Edit Master text styles</a:t>
             </a:r>
           </a:p>
           <a:p>
             <a:pPr lvl="1"/>
             <a:r>
-              <a:rPr lang="en-US" altLang="zh-TW" smtClean="0"/>
+              <a:rPr lang="en-US" altLang="zh-TW"/>
               <a:t>Second level</a:t>
             </a:r>
           </a:p>
           <a:p>
             <a:pPr lvl="2"/>
             <a:r>
-              <a:rPr lang="en-US" altLang="zh-TW" smtClean="0"/>
+              <a:rPr lang="en-US" altLang="zh-TW"/>
               <a:t>Third level</a:t>
             </a:r>
           </a:p>
           <a:p>
             <a:pPr lvl="3"/>
             <a:r>
-              <a:rPr lang="en-US" altLang="zh-TW" smtClean="0"/>
+              <a:rPr lang="en-US" altLang="zh-TW"/>
               <a:t>Fourth level</a:t>
             </a:r>
           </a:p>
           <a:p>
             <a:pPr lvl="4"/>
             <a:r>
-              <a:rPr lang="en-US" altLang="zh-TW" smtClean="0"/>
+              <a:rPr lang="en-US" altLang="zh-TW"/>
               <a:t>Fifth level</a:t>
             </a:r>
             <a:endParaRPr lang="zh-TW" altLang="en-US"/>
@@ -1667,7 +1667,7 @@
           <a:p>
             <a:pPr lvl="0"/>
             <a:r>
-              <a:rPr lang="en-US" altLang="zh-TW" smtClean="0"/>
+              <a:rPr lang="en-US" altLang="zh-TW"/>
               <a:t>Edit Master text styles</a:t>
             </a:r>
           </a:p>
@@ -1723,35 +1723,35 @@
           <a:p>
             <a:pPr lvl="0"/>
             <a:r>
-              <a:rPr lang="en-US" altLang="zh-TW" smtClean="0"/>
+              <a:rPr lang="en-US" altLang="zh-TW"/>
               <a:t>Edit Master text styles</a:t>
             </a:r>
           </a:p>
           <a:p>
             <a:pPr lvl="1"/>
             <a:r>
-              <a:rPr lang="en-US" altLang="zh-TW" smtClean="0"/>
+              <a:rPr lang="en-US" altLang="zh-TW"/>
               <a:t>Second level</a:t>
             </a:r>
           </a:p>
           <a:p>
             <a:pPr lvl="2"/>
             <a:r>
-              <a:rPr lang="en-US" altLang="zh-TW" smtClean="0"/>
+              <a:rPr lang="en-US" altLang="zh-TW"/>
               <a:t>Third level</a:t>
             </a:r>
           </a:p>
           <a:p>
             <a:pPr lvl="3"/>
             <a:r>
-              <a:rPr lang="en-US" altLang="zh-TW" smtClean="0"/>
+              <a:rPr lang="en-US" altLang="zh-TW"/>
               <a:t>Fourth level</a:t>
             </a:r>
           </a:p>
           <a:p>
             <a:pPr lvl="4"/>
             <a:r>
-              <a:rPr lang="en-US" altLang="zh-TW" smtClean="0"/>
+              <a:rPr lang="en-US" altLang="zh-TW"/>
               <a:t>Fifth level</a:t>
             </a:r>
             <a:endParaRPr lang="zh-TW" altLang="en-US"/>
@@ -1775,7 +1775,7 @@
           <a:p>
             <a:fld id="{CF94A76A-8AAB-40C7-807F-FA7898E03B8A}" type="datetimeFigureOut">
               <a:rPr lang="vi-VN" smtClean="0"/>
-              <a:t>09/06/2022</a:t>
+              <a:t>07/11/2025</a:t>
             </a:fld>
             <a:endParaRPr lang="vi-VN"/>
           </a:p>
@@ -1869,7 +1869,7 @@
           <a:lstStyle/>
           <a:p>
             <a:r>
-              <a:rPr lang="en-US" altLang="zh-TW" smtClean="0"/>
+              <a:rPr lang="en-US" altLang="zh-TW"/>
               <a:t>Click to edit Master title style</a:t>
             </a:r>
             <a:endParaRPr lang="zh-TW" altLang="en-US"/>
@@ -1893,7 +1893,7 @@
           <a:p>
             <a:fld id="{CF94A76A-8AAB-40C7-807F-FA7898E03B8A}" type="datetimeFigureOut">
               <a:rPr lang="vi-VN" smtClean="0"/>
-              <a:t>09/06/2022</a:t>
+              <a:t>07/11/2025</a:t>
             </a:fld>
             <a:endParaRPr lang="vi-VN"/>
           </a:p>
@@ -1988,7 +1988,7 @@
           <a:p>
             <a:fld id="{CF94A76A-8AAB-40C7-807F-FA7898E03B8A}" type="datetimeFigureOut">
               <a:rPr lang="vi-VN" smtClean="0"/>
-              <a:t>09/06/2022</a:t>
+              <a:t>07/11/2025</a:t>
             </a:fld>
             <a:endParaRPr lang="vi-VN"/>
           </a:p>
@@ -2091,7 +2091,7 @@
           </a:lstStyle>
           <a:p>
             <a:r>
-              <a:rPr lang="en-US" altLang="zh-TW" smtClean="0"/>
+              <a:rPr lang="en-US" altLang="zh-TW"/>
               <a:t>Click to edit Master title style</a:t>
             </a:r>
             <a:endParaRPr lang="zh-TW" altLang="en-US"/>
@@ -2148,35 +2148,35 @@
           <a:p>
             <a:pPr lvl="0"/>
             <a:r>
-              <a:rPr lang="en-US" altLang="zh-TW" smtClean="0"/>
+              <a:rPr lang="en-US" altLang="zh-TW"/>
               <a:t>Edit Master text styles</a:t>
             </a:r>
           </a:p>
           <a:p>
             <a:pPr lvl="1"/>
             <a:r>
-              <a:rPr lang="en-US" altLang="zh-TW" smtClean="0"/>
+              <a:rPr lang="en-US" altLang="zh-TW"/>
               <a:t>Second level</a:t>
             </a:r>
           </a:p>
           <a:p>
             <a:pPr lvl="2"/>
             <a:r>
-              <a:rPr lang="en-US" altLang="zh-TW" smtClean="0"/>
+              <a:rPr lang="en-US" altLang="zh-TW"/>
               <a:t>Third level</a:t>
             </a:r>
           </a:p>
           <a:p>
             <a:pPr lvl="3"/>
             <a:r>
-              <a:rPr lang="en-US" altLang="zh-TW" smtClean="0"/>
+              <a:rPr lang="en-US" altLang="zh-TW"/>
               <a:t>Fourth level</a:t>
             </a:r>
           </a:p>
           <a:p>
             <a:pPr lvl="4"/>
             <a:r>
-              <a:rPr lang="en-US" altLang="zh-TW" smtClean="0"/>
+              <a:rPr lang="en-US" altLang="zh-TW"/>
               <a:t>Fifth level</a:t>
             </a:r>
             <a:endParaRPr lang="zh-TW" altLang="en-US"/>
@@ -2242,7 +2242,7 @@
           <a:p>
             <a:pPr lvl="0"/>
             <a:r>
-              <a:rPr lang="en-US" altLang="zh-TW" smtClean="0"/>
+              <a:rPr lang="en-US" altLang="zh-TW"/>
               <a:t>Edit Master text styles</a:t>
             </a:r>
           </a:p>
@@ -2265,7 +2265,7 @@
           <a:p>
             <a:fld id="{CF94A76A-8AAB-40C7-807F-FA7898E03B8A}" type="datetimeFigureOut">
               <a:rPr lang="vi-VN" smtClean="0"/>
-              <a:t>09/06/2022</a:t>
+              <a:t>07/11/2025</a:t>
             </a:fld>
             <a:endParaRPr lang="vi-VN"/>
           </a:p>
@@ -2368,7 +2368,7 @@
           </a:lstStyle>
           <a:p>
             <a:r>
-              <a:rPr lang="en-US" altLang="zh-TW" smtClean="0"/>
+              <a:rPr lang="en-US" altLang="zh-TW"/>
               <a:t>Click to edit Master title style</a:t>
             </a:r>
             <a:endParaRPr lang="zh-TW" altLang="en-US"/>
@@ -2433,7 +2433,7 @@
           </a:lstStyle>
           <a:p>
             <a:r>
-              <a:rPr lang="en-US" altLang="zh-TW" smtClean="0"/>
+              <a:rPr lang="en-US" altLang="zh-TW"/>
               <a:t>Click icon to add picture</a:t>
             </a:r>
             <a:endParaRPr lang="zh-TW" altLang="en-US"/>
@@ -2499,7 +2499,7 @@
           <a:p>
             <a:pPr lvl="0"/>
             <a:r>
-              <a:rPr lang="en-US" altLang="zh-TW" smtClean="0"/>
+              <a:rPr lang="en-US" altLang="zh-TW"/>
               <a:t>Edit Master text styles</a:t>
             </a:r>
           </a:p>
@@ -2522,7 +2522,7 @@
           <a:p>
             <a:fld id="{CF94A76A-8AAB-40C7-807F-FA7898E03B8A}" type="datetimeFigureOut">
               <a:rPr lang="vi-VN" smtClean="0"/>
-              <a:t>09/06/2022</a:t>
+              <a:t>07/11/2025</a:t>
             </a:fld>
             <a:endParaRPr lang="vi-VN"/>
           </a:p>
@@ -2636,10 +2636,9 @@
           <a:lstStyle/>
           <a:p>
             <a:r>
-              <a:rPr lang="zh-TW" altLang="en-US" smtClean="0"/>
+              <a:rPr lang="zh-TW" altLang="en-US"/>
               <a:t>按一下以編輯母片標題樣式</a:t>
             </a:r>
-            <a:endParaRPr lang="zh-TW" altLang="en-US"/>
           </a:p>
         </p:txBody>
       </p:sp>
@@ -2670,38 +2669,37 @@
           <a:p>
             <a:pPr lvl="0"/>
             <a:r>
-              <a:rPr lang="zh-TW" altLang="en-US" smtClean="0"/>
+              <a:rPr lang="zh-TW" altLang="en-US"/>
               <a:t>按一下以編輯母片文字樣式</a:t>
             </a:r>
           </a:p>
           <a:p>
             <a:pPr lvl="1"/>
             <a:r>
-              <a:rPr lang="zh-TW" altLang="en-US" smtClean="0"/>
+              <a:rPr lang="zh-TW" altLang="en-US"/>
               <a:t>第二層</a:t>
             </a:r>
           </a:p>
           <a:p>
             <a:pPr lvl="2"/>
             <a:r>
-              <a:rPr lang="zh-TW" altLang="en-US" smtClean="0"/>
+              <a:rPr lang="zh-TW" altLang="en-US"/>
               <a:t>第三層</a:t>
             </a:r>
           </a:p>
           <a:p>
             <a:pPr lvl="3"/>
             <a:r>
-              <a:rPr lang="zh-TW" altLang="en-US" smtClean="0"/>
+              <a:rPr lang="zh-TW" altLang="en-US"/>
               <a:t>第四層</a:t>
             </a:r>
           </a:p>
           <a:p>
             <a:pPr lvl="4"/>
             <a:r>
-              <a:rPr lang="zh-TW" altLang="en-US" smtClean="0"/>
+              <a:rPr lang="zh-TW" altLang="en-US"/>
               <a:t>第五層</a:t>
             </a:r>
-            <a:endParaRPr lang="zh-TW" altLang="en-US"/>
           </a:p>
         </p:txBody>
       </p:sp>
@@ -2740,7 +2738,7 @@
           <a:p>
             <a:fld id="{CF94A76A-8AAB-40C7-807F-FA7898E03B8A}" type="datetimeFigureOut">
               <a:rPr lang="vi-VN" smtClean="0"/>
-              <a:t>09/06/2022</a:t>
+              <a:t>07/11/2025</a:t>
             </a:fld>
             <a:endParaRPr lang="vi-VN"/>
           </a:p>
@@ -3152,24 +3150,7 @@
                 <a:latin typeface="微軟正黑體" pitchFamily="34" charset="-120"/>
                 <a:ea typeface="微軟正黑體" pitchFamily="34" charset="-120"/>
               </a:rPr>
-              <a:t>選</a:t>
-            </a:r>
-            <a:r>
-              <a:rPr lang="zh-CN" altLang="en-US" sz="7200" b="1" i="1" dirty="0">
-                <a:solidFill>
-                  <a:srgbClr val="660033"/>
-                </a:solidFill>
-                <a:effectLst>
-                  <a:outerShdw blurRad="38100" dist="38100" dir="2700000" algn="tl">
-                    <a:srgbClr val="000000">
-                      <a:alpha val="43137"/>
-                    </a:srgbClr>
-                  </a:outerShdw>
-                </a:effectLst>
-                <a:latin typeface="微軟正黑體" pitchFamily="34" charset="-120"/>
-                <a:ea typeface="微軟正黑體" pitchFamily="34" charset="-120"/>
-              </a:rPr>
-              <a:t>擇相信</a:t>
+              <a:t>選擇相信</a:t>
             </a:r>
             <a:endParaRPr lang="zh-TW" altLang="en-US" sz="7200" b="1" i="1" dirty="0">
               <a:solidFill>
@@ -3326,7 +3307,7 @@
                 <a:latin typeface="Microsoft JhengHei" panose="020B0604030504040204" pitchFamily="34" charset="-120"/>
                 <a:ea typeface="Microsoft JhengHei" panose="020B0604030504040204" pitchFamily="34" charset="-120"/>
               </a:rPr>
-              <a:t>正</a:t>
+              <a:t>正歌</a:t>
             </a:r>
             <a:r>
               <a:rPr lang="en-US" sz="4267" b="1" dirty="0">
@@ -3410,17 +3391,7 @@
                 <a:latin typeface="微軟正黑體" pitchFamily="34" charset="-120"/>
                 <a:ea typeface="微軟正黑體" pitchFamily="34" charset="-120"/>
               </a:rPr>
-              <a:t>賜給我一顆永永遠</a:t>
-            </a:r>
-            <a:r>
-              <a:rPr lang="zh-TW" altLang="en-US" sz="6400" b="1" dirty="0">
-                <a:solidFill>
-                  <a:srgbClr val="660033"/>
-                </a:solidFill>
-                <a:latin typeface="微軟正黑體" pitchFamily="34" charset="-120"/>
-                <a:ea typeface="微軟正黑體" pitchFamily="34" charset="-120"/>
-              </a:rPr>
-              <a:t>遠</a:t>
+              <a:t>賜給我一顆永永遠遠</a:t>
             </a:r>
             <a:endParaRPr lang="en-US" altLang="zh-TW" sz="6400" b="1" dirty="0">
               <a:solidFill>
@@ -3495,7 +3466,7 @@
                 <a:latin typeface="Microsoft JhengHei" panose="020B0604030504040204" pitchFamily="34" charset="-120"/>
                 <a:ea typeface="Microsoft JhengHei" panose="020B0604030504040204" pitchFamily="34" charset="-120"/>
               </a:rPr>
-              <a:t>正</a:t>
+              <a:t>正歌</a:t>
             </a:r>
             <a:r>
               <a:rPr lang="en-US" sz="4267" b="1" dirty="0">
@@ -3654,7 +3625,7 @@
                 <a:latin typeface="Microsoft JhengHei" panose="020B0604030504040204" pitchFamily="34" charset="-120"/>
                 <a:ea typeface="Microsoft JhengHei" panose="020B0604030504040204" pitchFamily="34" charset="-120"/>
               </a:rPr>
-              <a:t>正</a:t>
+              <a:t>正歌</a:t>
             </a:r>
             <a:r>
               <a:rPr lang="en-US" sz="4267" b="1" dirty="0">
@@ -3813,7 +3784,7 @@
                 <a:latin typeface="Microsoft JhengHei" panose="020B0604030504040204" pitchFamily="34" charset="-120"/>
                 <a:ea typeface="Microsoft JhengHei" panose="020B0604030504040204" pitchFamily="34" charset="-120"/>
               </a:rPr>
-              <a:t>正</a:t>
+              <a:t>正歌</a:t>
             </a:r>
             <a:r>
               <a:rPr lang="en-US" sz="4267" b="1" dirty="0">
@@ -3972,7 +3943,7 @@
                 <a:latin typeface="Microsoft JhengHei" panose="020B0604030504040204" pitchFamily="34" charset="-120"/>
                 <a:ea typeface="Microsoft JhengHei" panose="020B0604030504040204" pitchFamily="34" charset="-120"/>
               </a:rPr>
-              <a:t>副</a:t>
+              <a:t>副歌</a:t>
             </a:r>
             <a:r>
               <a:rPr lang="en-US" sz="4267" b="1" dirty="0">
@@ -4131,7 +4102,7 @@
                 <a:latin typeface="Microsoft JhengHei" panose="020B0604030504040204" pitchFamily="34" charset="-120"/>
                 <a:ea typeface="Microsoft JhengHei" panose="020B0604030504040204" pitchFamily="34" charset="-120"/>
               </a:rPr>
-              <a:t>副</a:t>
+              <a:t>副歌</a:t>
             </a:r>
             <a:r>
               <a:rPr lang="en-US" sz="4267" b="1" dirty="0">
